--- a/dataset/guides_final/ACS/guide/IT-ACS-001_사내 시스템 접근권한 신청 가이드.pptx
+++ b/dataset/guides_final/ACS/guide/IT-ACS-001_사내 시스템 접근권한 신청 가이드.pptx
@@ -3250,7 +3250,7 @@
                 <a:ea typeface="Malgun Gothic"/>
                 <a:cs typeface="Malgun Gothic"/>
               </a:rPr>
-              <a:t>한화시스템 ICT 임직원 IT 안내 · 접근권한</a:t>
+              <a:t>가상 ICT 기업 임직원 IT 안내 · 접근권한</a:t>
             </a:r>
           </a:p>
         </p:txBody>
@@ -3482,7 +3482,7 @@
                 <a:ea typeface="Malgun Gothic"/>
                 <a:cs typeface="Malgun Gothic"/>
               </a:rPr>
-              <a:t>© HANWHA SYSTEMS ICT · IT-ACS-001 · 사내 일반</a:t>
+              <a:t>© 가상 ICT 기업 · IT-ACS-001 · 사내 일반</a:t>
             </a:r>
           </a:p>
         </p:txBody>
@@ -5733,7 +5733,7 @@
                 <a:ea typeface="Malgun Gothic"/>
                 <a:cs typeface="Malgun Gothic"/>
               </a:rPr>
-              <a:t>© HANWHA SYSTEMS ICT · IT-ACS-001 · 사내 일반</a:t>
+              <a:t>© 가상 ICT 기업 · IT-ACS-001 · 사내 일반</a:t>
             </a:r>
           </a:p>
         </p:txBody>
@@ -7496,7 +7496,7 @@
                 <a:ea typeface="Malgun Gothic"/>
                 <a:cs typeface="Malgun Gothic"/>
               </a:rPr>
-              <a:t>© HANWHA SYSTEMS ICT · IT-ACS-001 · 사내 일반</a:t>
+              <a:t>© 가상 ICT 기업 · IT-ACS-001 · 사내 일반</a:t>
             </a:r>
           </a:p>
         </p:txBody>
@@ -7988,7 +7988,7 @@
                 <a:ea typeface="Malgun Gothic"/>
                 <a:cs typeface="Malgun Gothic"/>
               </a:rPr>
-              <a:t>© HANWHA SYSTEMS ICT · IT-ACS-001 · 사내 일반</a:t>
+              <a:t>© 가상 ICT 기업 · IT-ACS-001 · 사내 일반</a:t>
             </a:r>
           </a:p>
         </p:txBody>
@@ -8574,7 +8574,7 @@
                 <a:ea typeface="Malgun Gothic"/>
                 <a:cs typeface="Malgun Gothic"/>
               </a:rPr>
-              <a:t>© HANWHA SYSTEMS ICT · IT-ACS-001 · 사내 일반</a:t>
+              <a:t>© 가상 ICT 기업 · IT-ACS-001 · 사내 일반</a:t>
             </a:r>
           </a:p>
         </p:txBody>
@@ -10979,7 +10979,7 @@
                 <a:ea typeface="Malgun Gothic"/>
                 <a:cs typeface="Malgun Gothic"/>
               </a:rPr>
-              <a:t>© HANWHA SYSTEMS ICT · IT-ACS-001 · 사내 일반</a:t>
+              <a:t>© 가상 ICT 기업 · IT-ACS-001 · 사내 일반</a:t>
             </a:r>
           </a:p>
         </p:txBody>
@@ -12466,7 +12466,7 @@
                 <a:ea typeface="Malgun Gothic"/>
                 <a:cs typeface="Malgun Gothic"/>
               </a:rPr>
-              <a:t>© HANWHA SYSTEMS ICT · IT-ACS-001 · 사내 일반</a:t>
+              <a:t>© 가상 ICT 기업 · IT-ACS-001 · 사내 일반</a:t>
             </a:r>
           </a:p>
         </p:txBody>
@@ -13096,7 +13096,7 @@
                 <a:ea typeface="Malgun Gothic"/>
                 <a:cs typeface="Malgun Gothic"/>
               </a:rPr>
-              <a:t>© HANWHA SYSTEMS ICT · IT-ACS-001 · 사내 일반</a:t>
+              <a:t>© 가상 ICT 기업 · IT-ACS-001 · 사내 일반</a:t>
             </a:r>
           </a:p>
         </p:txBody>
@@ -14385,7 +14385,7 @@
                 <a:ea typeface="Malgun Gothic"/>
                 <a:cs typeface="Malgun Gothic"/>
               </a:rPr>
-              <a:t>© HANWHA SYSTEMS ICT · IT-ACS-001 · 사내 일반</a:t>
+              <a:t>© 가상 ICT 기업 · IT-ACS-001 · 사내 일반</a:t>
             </a:r>
           </a:p>
         </p:txBody>
@@ -15778,7 +15778,7 @@
                 <a:ea typeface="Malgun Gothic"/>
                 <a:cs typeface="Malgun Gothic"/>
               </a:rPr>
-              <a:t>© HANWHA SYSTEMS ICT · IT-ACS-001 · 사내 일반</a:t>
+              <a:t>© 가상 ICT 기업 · IT-ACS-001 · 사내 일반</a:t>
             </a:r>
           </a:p>
         </p:txBody>
@@ -16270,7 +16270,7 @@
                 <a:ea typeface="Malgun Gothic"/>
                 <a:cs typeface="Malgun Gothic"/>
               </a:rPr>
-              <a:t>© HANWHA SYSTEMS ICT · IT-ACS-001 · 사내 일반</a:t>
+              <a:t>© 가상 ICT 기업 · IT-ACS-001 · 사내 일반</a:t>
             </a:r>
           </a:p>
         </p:txBody>
@@ -18075,7 +18075,7 @@
                 <a:ea typeface="Malgun Gothic"/>
                 <a:cs typeface="Malgun Gothic"/>
               </a:rPr>
-              <a:t>© HANWHA SYSTEMS ICT · IT-ACS-001 · 사내 일반</a:t>
+              <a:t>© 가상 ICT 기업 · IT-ACS-001 · 사내 일반</a:t>
             </a:r>
           </a:p>
         </p:txBody>
@@ -19087,7 +19087,7 @@
                 <a:ea typeface="Malgun Gothic"/>
                 <a:cs typeface="Malgun Gothic"/>
               </a:rPr>
-              <a:t>© HANWHA SYSTEMS ICT · IT-ACS-001 · 사내 일반</a:t>
+              <a:t>© 가상 ICT 기업 · IT-ACS-001 · 사내 일반</a:t>
             </a:r>
           </a:p>
         </p:txBody>
@@ -20760,7 +20760,7 @@
                 <a:ea typeface="Malgun Gothic"/>
                 <a:cs typeface="Malgun Gothic"/>
               </a:rPr>
-              <a:t>© HANWHA SYSTEMS ICT · IT-ACS-001 · 사내 일반</a:t>
+              <a:t>© 가상 ICT 기업 · IT-ACS-001 · 사내 일반</a:t>
             </a:r>
           </a:p>
         </p:txBody>
@@ -21252,7 +21252,7 @@
                 <a:ea typeface="Malgun Gothic"/>
                 <a:cs typeface="Malgun Gothic"/>
               </a:rPr>
-              <a:t>© HANWHA SYSTEMS ICT · IT-ACS-001 · 사내 일반</a:t>
+              <a:t>© 가상 ICT 기업 · IT-ACS-001 · 사내 일반</a:t>
             </a:r>
           </a:p>
         </p:txBody>
@@ -22758,7 +22758,7 @@
                 <a:ea typeface="Malgun Gothic"/>
                 <a:cs typeface="Malgun Gothic"/>
               </a:rPr>
-              <a:t>© HANWHA SYSTEMS ICT · IT-ACS-001 · 사내 일반</a:t>
+              <a:t>© 가상 ICT 기업 · IT-ACS-001 · 사내 일반</a:t>
             </a:r>
           </a:p>
         </p:txBody>
@@ -24386,7 +24386,7 @@
                 <a:ea typeface="Malgun Gothic"/>
                 <a:cs typeface="Malgun Gothic"/>
               </a:rPr>
-              <a:t>© HANWHA SYSTEMS ICT · IT-ACS-001 · 사내 일반</a:t>
+              <a:t>© 가상 ICT 기업 · IT-ACS-001 · 사내 일반</a:t>
             </a:r>
           </a:p>
         </p:txBody>
@@ -24925,7 +24925,7 @@
                 <a:ea typeface="Malgun Gothic"/>
                 <a:cs typeface="Malgun Gothic"/>
               </a:rPr>
-              <a:t>© HANWHA SYSTEMS ICT · IT-ACS-001 · 사내 일반</a:t>
+              <a:t>© 가상 ICT 기업 · IT-ACS-001 · 사내 일반</a:t>
             </a:r>
           </a:p>
         </p:txBody>
@@ -26125,7 +26125,7 @@
                 <a:ea typeface="Malgun Gothic"/>
                 <a:cs typeface="Malgun Gothic"/>
               </a:rPr>
-              <a:t>© HANWHA SYSTEMS ICT · IT-ACS-001 · 사내 일반</a:t>
+              <a:t>© 가상 ICT 기업 · IT-ACS-001 · 사내 일반</a:t>
             </a:r>
           </a:p>
         </p:txBody>
@@ -27705,7 +27705,7 @@
                 <a:ea typeface="Malgun Gothic"/>
                 <a:cs typeface="Malgun Gothic"/>
               </a:rPr>
-              <a:t>© HANWHA SYSTEMS ICT · IT-ACS-001 · 사내 일반</a:t>
+              <a:t>© 가상 ICT 기업 · IT-ACS-001 · 사내 일반</a:t>
             </a:r>
           </a:p>
         </p:txBody>
@@ -29019,7 +29019,7 @@
                 <a:ea typeface="Malgun Gothic"/>
                 <a:cs typeface="Malgun Gothic"/>
               </a:rPr>
-              <a:t>© HANWHA SYSTEMS ICT · IT-ACS-001 · 사내 일반</a:t>
+              <a:t>© 가상 ICT 기업 · IT-ACS-001 · 사내 일반</a:t>
             </a:r>
           </a:p>
         </p:txBody>
@@ -29267,7 +29267,7 @@
                 <a:ea typeface="Malgun Gothic"/>
                 <a:cs typeface="Malgun Gothic"/>
               </a:rPr>
-              <a:t>© HANWHA SYSTEMS ICT · IT-ACS-001 · 사내 일반</a:t>
+              <a:t>© 가상 ICT 기업 · IT-ACS-001 · 사내 일반</a:t>
             </a:r>
           </a:p>
         </p:txBody>
@@ -30543,7 +30543,7 @@
                 <a:ea typeface="Malgun Gothic"/>
                 <a:cs typeface="Malgun Gothic"/>
               </a:rPr>
-              <a:t>© HANWHA SYSTEMS ICT · IT-ACS-001 · 사내 일반</a:t>
+              <a:t>© 가상 ICT 기업 · IT-ACS-001 · 사내 일반</a:t>
             </a:r>
           </a:p>
         </p:txBody>
@@ -31460,7 +31460,7 @@
                 <a:ea typeface="Malgun Gothic"/>
                 <a:cs typeface="Malgun Gothic"/>
               </a:rPr>
-              <a:t>© HANWHA SYSTEMS ICT · IT-ACS-001 · 사내 일반</a:t>
+              <a:t>© 가상 ICT 기업 · IT-ACS-001 · 사내 일반</a:t>
             </a:r>
           </a:p>
         </p:txBody>
@@ -31708,7 +31708,7 @@
                 <a:ea typeface="Malgun Gothic"/>
                 <a:cs typeface="Malgun Gothic"/>
               </a:rPr>
-              <a:t>© HANWHA SYSTEMS ICT · IT-ACS-001 · 사내 일반</a:t>
+              <a:t>© 가상 ICT 기업 · IT-ACS-001 · 사내 일반</a:t>
             </a:r>
           </a:p>
         </p:txBody>
@@ -32365,7 +32365,7 @@
                 <a:ea typeface="Malgun Gothic"/>
                 <a:cs typeface="Malgun Gothic"/>
               </a:rPr>
-              <a:t>© HANWHA SYSTEMS ICT · IT-ACS-001 · 사내 일반</a:t>
+              <a:t>© 가상 ICT 기업 · IT-ACS-001 · 사내 일반</a:t>
             </a:r>
           </a:p>
         </p:txBody>
@@ -32613,7 +32613,7 @@
                 <a:ea typeface="Malgun Gothic"/>
                 <a:cs typeface="Malgun Gothic"/>
               </a:rPr>
-              <a:t>© HANWHA SYSTEMS ICT · IT-ACS-001 · 사내 일반</a:t>
+              <a:t>© 가상 ICT 기업 · IT-ACS-001 · 사내 일반</a:t>
             </a:r>
           </a:p>
         </p:txBody>
@@ -33125,7 +33125,7 @@
                           <a:ea typeface="Malgun Gothic"/>
                           <a:cs typeface="Malgun Gothic"/>
                         </a:rPr>
-                        <a:t>사내 IT 포털(hanwha-admin) 상단 [챗봇 문의]</a:t>
+                        <a:t>사내 IT 포털 상단 [챗봇 문의]</a:t>
                       </a:r>
                     </a:p>
                   </a:txBody>
@@ -33817,7 +33817,7 @@
                           <a:ea typeface="Malgun Gothic"/>
                           <a:cs typeface="Malgun Gothic"/>
                         </a:rPr>
-                        <a:t>it-helpdesk@hanwha-ict.example</a:t>
+                        <a:t>it-helpdesk@ict.example</a:t>
                       </a:r>
                     </a:p>
                   </a:txBody>
@@ -34116,7 +34116,7 @@
                 <a:ea typeface="Malgun Gothic"/>
                 <a:cs typeface="Malgun Gothic"/>
               </a:rPr>
-              <a:t>© HANWHA SYSTEMS ICT · IT-ACS-001 · 사내 일반</a:t>
+              <a:t>© 가상 ICT 기업 · IT-ACS-001 · 사내 일반</a:t>
             </a:r>
           </a:p>
         </p:txBody>
@@ -34364,7 +34364,7 @@
                 <a:ea typeface="Malgun Gothic"/>
                 <a:cs typeface="Malgun Gothic"/>
               </a:rPr>
-              <a:t>© HANWHA SYSTEMS ICT · IT-ACS-001 · 사내 일반</a:t>
+              <a:t>© 가상 ICT 기업 · IT-ACS-001 · 사내 일반</a:t>
             </a:r>
           </a:p>
         </p:txBody>
@@ -36523,7 +36523,7 @@
                 <a:ea typeface="Malgun Gothic"/>
                 <a:cs typeface="Malgun Gothic"/>
               </a:rPr>
-              <a:t>© HANWHA SYSTEMS ICT · IT-ACS-001 · 사내 일반</a:t>
+              <a:t>© 가상 ICT 기업 · IT-ACS-001 · 사내 일반</a:t>
             </a:r>
           </a:p>
         </p:txBody>
@@ -37722,7 +37722,7 @@
                 <a:ea typeface="Malgun Gothic"/>
                 <a:cs typeface="Malgun Gothic"/>
               </a:rPr>
-              <a:t>© HANWHA SYSTEMS ICT · IT-ACS-001 · 사내 일반</a:t>
+              <a:t>© 가상 ICT 기업 · IT-ACS-001 · 사내 일반</a:t>
             </a:r>
           </a:p>
         </p:txBody>
@@ -37970,7 +37970,7 @@
                 <a:ea typeface="Malgun Gothic"/>
                 <a:cs typeface="Malgun Gothic"/>
               </a:rPr>
-              <a:t>© HANWHA SYSTEMS ICT · IT-ACS-001 · 사내 일반</a:t>
+              <a:t>© 가상 ICT 기업 · IT-ACS-001 · 사내 일반</a:t>
             </a:r>
           </a:p>
         </p:txBody>
@@ -39312,7 +39312,7 @@
                 <a:ea typeface="Malgun Gothic"/>
                 <a:cs typeface="Malgun Gothic"/>
               </a:rPr>
-              <a:t>© HANWHA SYSTEMS ICT · IT-ACS-001 · 사내 일반</a:t>
+              <a:t>© 가상 ICT 기업 · IT-ACS-001 · 사내 일반</a:t>
             </a:r>
           </a:p>
         </p:txBody>
@@ -39560,7 +39560,7 @@
                 <a:ea typeface="Malgun Gothic"/>
                 <a:cs typeface="Malgun Gothic"/>
               </a:rPr>
-              <a:t>© HANWHA SYSTEMS ICT · IT-ACS-001 · 사내 일반</a:t>
+              <a:t>© 가상 ICT 기업 · IT-ACS-001 · 사내 일반</a:t>
             </a:r>
           </a:p>
         </p:txBody>
@@ -40542,7 +40542,7 @@
                 <a:ea typeface="Malgun Gothic"/>
                 <a:cs typeface="Malgun Gothic"/>
               </a:rPr>
-              <a:t>© HANWHA SYSTEMS ICT · IT-ACS-001 · 사내 일반</a:t>
+              <a:t>© 가상 ICT 기업 · IT-ACS-001 · 사내 일반</a:t>
             </a:r>
           </a:p>
         </p:txBody>
@@ -42569,7 +42569,7 @@
                 <a:ea typeface="Malgun Gothic"/>
                 <a:cs typeface="Malgun Gothic"/>
               </a:rPr>
-              <a:t>© HANWHA SYSTEMS ICT · IT-ACS-001 · 사내 일반</a:t>
+              <a:t>© 가상 ICT 기업 · IT-ACS-001 · 사내 일반</a:t>
             </a:r>
           </a:p>
         </p:txBody>
@@ -42817,7 +42817,7 @@
                 <a:ea typeface="Malgun Gothic"/>
                 <a:cs typeface="Malgun Gothic"/>
               </a:rPr>
-              <a:t>© HANWHA SYSTEMS ICT · IT-ACS-001 · 사내 일반</a:t>
+              <a:t>© 가상 ICT 기업 · IT-ACS-001 · 사내 일반</a:t>
             </a:r>
           </a:p>
         </p:txBody>
